--- a/doc/AGV_tech_slides_윤정.pptx
+++ b/doc/AGV_tech_slides_윤정.pptx
@@ -3862,7 +3862,7 @@
         </p:nvSpPr>
         <p:spPr>
           <a:xfrm>
-            <a:off x="412582" y="6550974"/>
+            <a:off x="834809" y="6506643"/>
             <a:ext cx="13039935" cy="2258920"/>
           </a:xfrm>
           <a:prstGeom prst="roundRect">
@@ -4019,7 +4019,7 @@
         </p:nvGrpSpPr>
         <p:grpSpPr>
           <a:xfrm>
-            <a:off x="151593" y="1299837"/>
+            <a:off x="554603" y="1180199"/>
             <a:ext cx="6163287" cy="4364205"/>
             <a:chOff x="151593" y="1177176"/>
             <a:chExt cx="6163287" cy="4364205"/>
@@ -5752,47 +5752,47 @@
           </p:sp>
         </p:grpSp>
       </p:grpSp>
+      <p:sp>
+        <p:nvSpPr>
+          <p:cNvPr id="63" name="Shape 119"/>
+          <p:cNvSpPr/>
+          <p:nvPr/>
+        </p:nvSpPr>
+        <p:spPr>
+          <a:xfrm>
+            <a:off x="7704053" y="1350023"/>
+            <a:ext cx="6801046" cy="4860915"/>
+          </a:xfrm>
+          <a:prstGeom prst="roundRect">
+            <a:avLst>
+              <a:gd name="adj" fmla="val 1460"/>
+            </a:avLst>
+          </a:prstGeom>
+          <a:solidFill>
+            <a:srgbClr val="091925"/>
+          </a:solidFill>
+          <a:ln w="38100">
+            <a:solidFill>
+              <a:schemeClr val="bg1"/>
+            </a:solidFill>
+            <a:prstDash val="dash"/>
+          </a:ln>
+        </p:spPr>
+      </p:sp>
       <p:grpSp>
         <p:nvGrpSpPr>
-          <p:cNvPr id="62" name="그룹 61"/>
+          <p:cNvPr id="159" name="그룹 158"/>
           <p:cNvGrpSpPr/>
           <p:nvPr/>
         </p:nvGrpSpPr>
         <p:grpSpPr>
           <a:xfrm>
-            <a:off x="8024127" y="996641"/>
-            <a:ext cx="4931657" cy="3004279"/>
-            <a:chOff x="6131517" y="1208696"/>
-            <a:chExt cx="4931657" cy="3004279"/>
+            <a:off x="8506617" y="1915905"/>
+            <a:ext cx="4617914" cy="2544737"/>
+            <a:chOff x="8015885" y="2737318"/>
+            <a:chExt cx="4077746" cy="2247073"/>
           </a:xfrm>
         </p:grpSpPr>
-        <p:sp>
-          <p:nvSpPr>
-            <p:cNvPr id="63" name="Shape 119"/>
-            <p:cNvSpPr/>
-            <p:nvPr/>
-          </p:nvSpPr>
-          <p:spPr>
-            <a:xfrm>
-              <a:off x="6511569" y="1401776"/>
-              <a:ext cx="4551605" cy="2811199"/>
-            </a:xfrm>
-            <a:prstGeom prst="roundRect">
-              <a:avLst>
-                <a:gd name="adj" fmla="val 1460"/>
-              </a:avLst>
-            </a:prstGeom>
-            <a:solidFill>
-              <a:srgbClr val="091925"/>
-            </a:solidFill>
-            <a:ln w="38100">
-              <a:solidFill>
-                <a:schemeClr val="bg1"/>
-              </a:solidFill>
-              <a:prstDash val="dash"/>
-            </a:ln>
-          </p:spPr>
-        </p:sp>
         <p:grpSp>
           <p:nvGrpSpPr>
             <p:cNvPr id="64" name="그룹 63"/>
@@ -5801,7 +5801,7 @@
           </p:nvGrpSpPr>
           <p:grpSpPr>
             <a:xfrm>
-              <a:off x="7862905" y="2113241"/>
+              <a:off x="9167119" y="3221636"/>
               <a:ext cx="1691640" cy="1051560"/>
               <a:chOff x="9466147" y="3533607"/>
               <a:chExt cx="1691640" cy="1051560"/>
@@ -5897,7 +5897,7 @@
           </p:nvGrpSpPr>
           <p:grpSpPr>
             <a:xfrm>
-              <a:off x="6711671" y="1628923"/>
+              <a:off x="8015885" y="2737318"/>
               <a:ext cx="2201847" cy="928140"/>
               <a:chOff x="6832675" y="3233752"/>
               <a:chExt cx="2201847" cy="928140"/>
@@ -6023,7 +6023,7 @@
             </p:nvSpPr>
             <p:spPr>
               <a:xfrm>
-                <a:off x="7014535" y="3526009"/>
+                <a:off x="6923254" y="3586187"/>
                 <a:ext cx="1415090" cy="562393"/>
               </a:xfrm>
               <a:prstGeom prst="rect">
@@ -6045,7 +6045,7 @@
                   <a:buNone/>
                 </a:pPr>
                 <a:r>
-                  <a:rPr lang="en-US" sz="770" smtClean="0">
+                  <a:rPr lang="en-US" sz="900" smtClean="0">
                     <a:solidFill>
                       <a:srgbClr val="465A69"/>
                     </a:solidFill>
@@ -6056,7 +6056,7 @@
                   <a:t>line </a:t>
                 </a:r>
                 <a:r>
-                  <a:rPr lang="en-US" sz="770" dirty="0">
+                  <a:rPr lang="en-US" sz="900" dirty="0">
                     <a:solidFill>
                       <a:srgbClr val="465A69"/>
                     </a:solidFill>
@@ -6066,7 +6066,7 @@
                   </a:rPr>
                   <a:t>HSV segmentation</a:t>
                 </a:r>
-                <a:endParaRPr lang="en-US" sz="770" dirty="0"/>
+                <a:endParaRPr lang="en-US" sz="900" dirty="0"/>
               </a:p>
               <a:p>
                 <a:pPr marL="0" indent="0">
@@ -6076,7 +6076,7 @@
                   <a:buNone/>
                 </a:pPr>
                 <a:r>
-                  <a:rPr lang="en-US" sz="770">
+                  <a:rPr lang="en-US" sz="900">
                     <a:solidFill>
                       <a:srgbClr val="465A69"/>
                     </a:solidFill>
@@ -6087,7 +6087,7 @@
                   <a:t>near/far </a:t>
                 </a:r>
                 <a:r>
-                  <a:rPr lang="en-US" sz="770" smtClean="0">
+                  <a:rPr lang="en-US" sz="900" smtClean="0">
                     <a:solidFill>
                       <a:srgbClr val="465A69"/>
                     </a:solidFill>
@@ -6098,7 +6098,7 @@
                   <a:t>ROI center </a:t>
                 </a:r>
                 <a:r>
-                  <a:rPr lang="en-US" sz="770" dirty="0">
+                  <a:rPr lang="en-US" sz="900" dirty="0">
                     <a:solidFill>
                       <a:srgbClr val="465A69"/>
                     </a:solidFill>
@@ -6108,7 +6108,7 @@
                   </a:rPr>
                   <a:t>추정</a:t>
                 </a:r>
-                <a:endParaRPr lang="en-US" sz="770" dirty="0"/>
+                <a:endParaRPr lang="en-US" sz="900" dirty="0"/>
               </a:p>
               <a:p>
                 <a:pPr marL="0" indent="0">
@@ -6118,7 +6118,7 @@
                   <a:buNone/>
                 </a:pPr>
                 <a:r>
-                  <a:rPr lang="en-US" sz="770" dirty="0">
+                  <a:rPr lang="en-US" sz="900" dirty="0">
                     <a:solidFill>
                       <a:srgbClr val="465A69"/>
                     </a:solidFill>
@@ -6128,7 +6128,7 @@
                   </a:rPr>
                   <a:t>linear.y 기반 횡보 보정</a:t>
                 </a:r>
-                <a:endParaRPr lang="en-US" sz="770" dirty="0"/>
+                <a:endParaRPr lang="en-US" sz="900" dirty="0"/>
               </a:p>
             </p:txBody>
           </p:sp>
@@ -6141,10 +6141,10 @@
           </p:nvGrpSpPr>
           <p:grpSpPr>
             <a:xfrm>
-              <a:off x="9126587" y="1632494"/>
-              <a:ext cx="1505669" cy="973917"/>
+              <a:off x="10430801" y="2740889"/>
+              <a:ext cx="1505669" cy="933830"/>
               <a:chOff x="9126587" y="1632494"/>
-              <a:chExt cx="1505669" cy="973917"/>
+              <a:chExt cx="1505669" cy="933830"/>
             </a:xfrm>
           </p:grpSpPr>
           <p:grpSp>
@@ -6156,9 +6156,9 @@
             <p:grpSpPr>
               <a:xfrm>
                 <a:off x="9126587" y="1632494"/>
-                <a:ext cx="1505669" cy="928140"/>
+                <a:ext cx="1505669" cy="805157"/>
                 <a:chOff x="6715312" y="3139182"/>
-                <a:chExt cx="1505669" cy="928140"/>
+                <a:chExt cx="1505669" cy="805157"/>
               </a:xfrm>
             </p:grpSpPr>
             <p:sp>
@@ -6169,8 +6169,8 @@
               </p:nvSpPr>
               <p:spPr>
                 <a:xfrm>
-                  <a:off x="6733599" y="3146325"/>
-                  <a:ext cx="1487382" cy="920997"/>
+                  <a:off x="6733599" y="3146326"/>
+                  <a:ext cx="1487382" cy="798013"/>
                 </a:xfrm>
                 <a:prstGeom prst="roundRect">
                   <a:avLst>
@@ -6267,7 +6267,7 @@
             </p:nvSpPr>
             <p:spPr>
               <a:xfrm>
-                <a:off x="9268318" y="1820027"/>
+                <a:off x="9229454" y="1779940"/>
                 <a:ext cx="1104193" cy="786384"/>
               </a:xfrm>
               <a:prstGeom prst="rect">
@@ -6289,7 +6289,7 @@
                   <a:buNone/>
                 </a:pPr>
                 <a:r>
-                  <a:rPr lang="en-US" sz="770" dirty="0">
+                  <a:rPr lang="en-US" sz="900" dirty="0">
                     <a:solidFill>
                       <a:srgbClr val="465A69"/>
                     </a:solidFill>
@@ -6299,7 +6299,7 @@
                   </a:rPr>
                   <a:t>QR stop ROI 제한</a:t>
                 </a:r>
-                <a:endParaRPr lang="en-US" sz="770" dirty="0"/>
+                <a:endParaRPr lang="en-US" sz="900" dirty="0"/>
               </a:p>
               <a:p>
                 <a:pPr marL="0" indent="0">
@@ -6309,7 +6309,7 @@
                   <a:buNone/>
                 </a:pPr>
                 <a:r>
-                  <a:rPr lang="en-US" sz="770">
+                  <a:rPr lang="en-US" sz="900">
                     <a:solidFill>
                       <a:srgbClr val="465A69"/>
                     </a:solidFill>
@@ -6320,7 +6320,7 @@
                   <a:t>bbox </a:t>
                 </a:r>
                 <a:r>
-                  <a:rPr lang="en-US" sz="770" smtClean="0">
+                  <a:rPr lang="en-US" sz="900" smtClean="0">
                     <a:solidFill>
                       <a:srgbClr val="465A69"/>
                     </a:solidFill>
@@ -6330,7 +6330,7 @@
                   </a:rPr>
                   <a:t>threshold</a:t>
                 </a:r>
-                <a:endParaRPr lang="en-US" sz="770" dirty="0"/>
+                <a:endParaRPr lang="en-US" sz="900" dirty="0"/>
               </a:p>
             </p:txBody>
           </p:sp>
@@ -6343,10 +6343,10 @@
           </p:nvGrpSpPr>
           <p:grpSpPr>
             <a:xfrm>
-              <a:off x="6938465" y="2888019"/>
-              <a:ext cx="1590437" cy="928140"/>
+              <a:off x="8242679" y="3996414"/>
+              <a:ext cx="1590437" cy="894010"/>
               <a:chOff x="6936343" y="2888019"/>
-              <a:chExt cx="1590437" cy="928140"/>
+              <a:chExt cx="1590437" cy="894010"/>
             </a:xfrm>
           </p:grpSpPr>
           <p:grpSp>
@@ -6358,9 +6358,9 @@
             <p:grpSpPr>
               <a:xfrm>
                 <a:off x="6936343" y="2888019"/>
-                <a:ext cx="1590437" cy="928140"/>
+                <a:ext cx="1590437" cy="784242"/>
                 <a:chOff x="6715312" y="3139182"/>
-                <a:chExt cx="1590437" cy="928140"/>
+                <a:chExt cx="1590437" cy="784242"/>
               </a:xfrm>
             </p:grpSpPr>
             <p:sp>
@@ -6371,8 +6371,8 @@
               </p:nvSpPr>
               <p:spPr>
                 <a:xfrm>
-                  <a:off x="6733599" y="3146325"/>
-                  <a:ext cx="1572150" cy="920997"/>
+                  <a:off x="6733599" y="3146326"/>
+                  <a:ext cx="1572150" cy="777098"/>
                 </a:xfrm>
                 <a:prstGeom prst="roundRect">
                   <a:avLst>
@@ -6469,7 +6469,7 @@
             </p:nvSpPr>
             <p:spPr>
               <a:xfrm>
-                <a:off x="7088706" y="3137764"/>
+                <a:off x="7037636" y="3111841"/>
                 <a:ext cx="1281268" cy="670188"/>
               </a:xfrm>
               <a:prstGeom prst="rect">
@@ -6491,7 +6491,7 @@
                   <a:buNone/>
                 </a:pPr>
                 <a:r>
-                  <a:rPr lang="en-US" sz="770" dirty="0">
+                  <a:rPr lang="en-US" sz="900" dirty="0">
                     <a:solidFill>
                       <a:srgbClr val="465A69"/>
                     </a:solidFill>
@@ -6501,7 +6501,7 @@
                   </a:rPr>
                   <a:t>white-wall ROI</a:t>
                 </a:r>
-                <a:endParaRPr lang="en-US" sz="770" dirty="0"/>
+                <a:endParaRPr lang="en-US" sz="900" dirty="0"/>
               </a:p>
               <a:p>
                 <a:pPr marL="0" indent="0">
@@ -6511,7 +6511,7 @@
                   <a:buNone/>
                 </a:pPr>
                 <a:r>
-                  <a:rPr lang="en-US" sz="770" dirty="0">
+                  <a:rPr lang="en-US" sz="900" dirty="0">
                     <a:solidFill>
                       <a:srgbClr val="465A69"/>
                     </a:solidFill>
@@ -6522,7 +6522,7 @@
                   <a:t>depth median + </a:t>
                 </a:r>
                 <a:r>
-                  <a:rPr lang="en-US" sz="770">
+                  <a:rPr lang="en-US" sz="900">
                     <a:solidFill>
                       <a:srgbClr val="465A69"/>
                     </a:solidFill>
@@ -6533,7 +6533,7 @@
                   <a:t>valid </a:t>
                 </a:r>
                 <a:r>
-                  <a:rPr lang="en-US" sz="770" smtClean="0">
+                  <a:rPr lang="en-US" sz="900" smtClean="0">
                     <a:solidFill>
                       <a:srgbClr val="465A69"/>
                     </a:solidFill>
@@ -6543,7 +6543,7 @@
                   </a:rPr>
                   <a:t>px</a:t>
                 </a:r>
-                <a:endParaRPr lang="en-US" sz="770" dirty="0"/>
+                <a:endParaRPr lang="en-US" sz="900" dirty="0"/>
               </a:p>
             </p:txBody>
           </p:sp>
@@ -6556,10 +6556,10 @@
           </p:nvGrpSpPr>
           <p:grpSpPr>
             <a:xfrm>
-              <a:off x="9283748" y="2879812"/>
-              <a:ext cx="1505669" cy="1010387"/>
+              <a:off x="10587962" y="3988207"/>
+              <a:ext cx="1505669" cy="996184"/>
               <a:chOff x="9283748" y="2879812"/>
-              <a:chExt cx="1505669" cy="1010387"/>
+              <a:chExt cx="1505669" cy="996184"/>
             </a:xfrm>
           </p:grpSpPr>
           <p:grpSp>
@@ -6682,7 +6682,7 @@
             </p:nvSpPr>
             <p:spPr>
               <a:xfrm>
-                <a:off x="9411386" y="3103815"/>
+                <a:off x="9379347" y="3089612"/>
                 <a:ext cx="1276106" cy="786384"/>
               </a:xfrm>
               <a:prstGeom prst="rect">
@@ -6704,7 +6704,7 @@
                   <a:buNone/>
                 </a:pPr>
                 <a:r>
-                  <a:rPr lang="en-US" sz="770" dirty="0">
+                  <a:rPr lang="en-US" sz="900" dirty="0">
                     <a:solidFill>
                       <a:srgbClr val="465A69"/>
                     </a:solidFill>
@@ -6714,7 +6714,7 @@
                   </a:rPr>
                   <a:t>cmd_vel_raw → cmd_vel</a:t>
                 </a:r>
-                <a:endParaRPr lang="en-US" sz="770" dirty="0"/>
+                <a:endParaRPr lang="en-US" sz="900" dirty="0"/>
               </a:p>
               <a:p>
                 <a:pPr marL="0" indent="0">
@@ -6724,7 +6724,7 @@
                   <a:buNone/>
                 </a:pPr>
                 <a:r>
-                  <a:rPr lang="en-US" sz="770" dirty="0">
+                  <a:rPr lang="en-US" sz="900" dirty="0">
                     <a:solidFill>
                       <a:srgbClr val="465A69"/>
                     </a:solidFill>
@@ -6734,7 +6734,7 @@
                   </a:rPr>
                   <a:t>angular pulse duty</a:t>
                 </a:r>
-                <a:endParaRPr lang="en-US" sz="770" dirty="0"/>
+                <a:endParaRPr lang="en-US" sz="900" dirty="0"/>
               </a:p>
               <a:p>
                 <a:pPr marL="0" indent="0">
@@ -6744,7 +6744,7 @@
                   <a:buNone/>
                 </a:pPr>
                 <a:r>
-                  <a:rPr lang="en-US" sz="770" dirty="0">
+                  <a:rPr lang="en-US" sz="900" dirty="0">
                     <a:solidFill>
                       <a:srgbClr val="465A69"/>
                     </a:solidFill>
@@ -6754,90 +6754,7 @@
                   </a:rPr>
                   <a:t>zero-cross hold + vx 제한</a:t>
                 </a:r>
-                <a:endParaRPr lang="en-US" sz="770" dirty="0"/>
-              </a:p>
-            </p:txBody>
-          </p:sp>
-        </p:grpSp>
-        <p:grpSp>
-          <p:nvGrpSpPr>
-            <p:cNvPr id="69" name="그룹 68"/>
-            <p:cNvGrpSpPr/>
-            <p:nvPr/>
-          </p:nvGrpSpPr>
-          <p:grpSpPr>
-            <a:xfrm>
-              <a:off x="6131517" y="1208696"/>
-              <a:ext cx="1808054" cy="301752"/>
-              <a:chOff x="6466915" y="1019007"/>
-              <a:chExt cx="1808054" cy="301752"/>
-            </a:xfrm>
-          </p:grpSpPr>
-          <p:sp>
-            <p:nvSpPr>
-              <p:cNvPr id="70" name="Shape 115"/>
-              <p:cNvSpPr/>
-              <p:nvPr/>
-            </p:nvSpPr>
-            <p:spPr>
-              <a:xfrm>
-                <a:off x="6466915" y="1019007"/>
-                <a:ext cx="1808054" cy="301752"/>
-              </a:xfrm>
-              <a:prstGeom prst="roundRect">
-                <a:avLst>
-                  <a:gd name="adj" fmla="val 24242"/>
-                </a:avLst>
-              </a:prstGeom>
-              <a:solidFill>
-                <a:srgbClr val="1EAD7C"/>
-              </a:solidFill>
-              <a:ln w="12700">
-                <a:solidFill>
-                  <a:srgbClr val="1EAD7C"/>
-                </a:solidFill>
-                <a:prstDash val="solid"/>
-              </a:ln>
-            </p:spPr>
-          </p:sp>
-          <p:sp>
-            <p:nvSpPr>
-              <p:cNvPr id="71" name="Text 116"/>
-              <p:cNvSpPr/>
-              <p:nvPr/>
-            </p:nvSpPr>
-            <p:spPr>
-              <a:xfrm>
-                <a:off x="6507110" y="1107214"/>
-                <a:ext cx="1746428" cy="128016"/>
-              </a:xfrm>
-              <a:prstGeom prst="rect">
-                <a:avLst/>
-              </a:prstGeom>
-              <a:noFill/>
-              <a:ln/>
-            </p:spPr>
-            <p:txBody>
-              <a:bodyPr wrap="square" lIns="0" tIns="0" rIns="0" bIns="0" rtlCol="0" anchor="ctr">
-                <a:noAutofit/>
-              </a:bodyPr>
-              <a:lstStyle/>
-              <a:p>
-                <a:pPr marL="0" indent="0" algn="ctr">
-                  <a:buNone/>
-                </a:pPr>
-                <a:r>
-                  <a:rPr lang="en-US" sz="1600" b="1" dirty="0">
-                    <a:solidFill>
-                      <a:srgbClr val="FFFFFF"/>
-                    </a:solidFill>
-                    <a:latin typeface="Malgun Gothic" pitchFamily="34" charset="0"/>
-                    <a:ea typeface="Malgun Gothic" pitchFamily="34" charset="-122"/>
-                    <a:cs typeface="Malgun Gothic" pitchFamily="34" charset="-120"/>
-                  </a:rPr>
-                  <a:t>Core Algorithms</a:t>
-                </a:r>
-                <a:endParaRPr lang="en-US" sz="1600" dirty="0"/>
+                <a:endParaRPr lang="en-US" sz="900" dirty="0"/>
               </a:p>
             </p:txBody>
           </p:sp>
@@ -6845,326 +6762,83 @@
       </p:grpSp>
       <p:grpSp>
         <p:nvGrpSpPr>
-          <p:cNvPr id="94" name="그룹 93"/>
+          <p:cNvPr id="69" name="그룹 68"/>
           <p:cNvGrpSpPr/>
           <p:nvPr/>
         </p:nvGrpSpPr>
         <p:grpSpPr>
           <a:xfrm>
-            <a:off x="5920186" y="3813911"/>
-            <a:ext cx="3072009" cy="2249200"/>
-            <a:chOff x="11642790" y="1800268"/>
-            <a:chExt cx="3072009" cy="2249200"/>
+            <a:off x="7429315" y="1156943"/>
+            <a:ext cx="1808054" cy="301752"/>
+            <a:chOff x="6466915" y="1019007"/>
+            <a:chExt cx="1808054" cy="301752"/>
           </a:xfrm>
         </p:grpSpPr>
-        <p:grpSp>
-          <p:nvGrpSpPr>
-            <p:cNvPr id="95" name="그룹 94"/>
-            <p:cNvGrpSpPr/>
-            <p:nvPr/>
-          </p:nvGrpSpPr>
-          <p:grpSpPr>
-            <a:xfrm>
-              <a:off x="11642790" y="1800268"/>
-              <a:ext cx="3072009" cy="2249200"/>
-              <a:chOff x="11819074" y="2836289"/>
-              <a:chExt cx="3072009" cy="2249200"/>
-            </a:xfrm>
-          </p:grpSpPr>
-          <p:grpSp>
-            <p:nvGrpSpPr>
-              <p:cNvPr id="97" name="그룹 96"/>
-              <p:cNvGrpSpPr/>
-              <p:nvPr/>
-            </p:nvGrpSpPr>
-            <p:grpSpPr>
-              <a:xfrm>
-                <a:off x="11819074" y="2836289"/>
-                <a:ext cx="3053444" cy="2249200"/>
-                <a:chOff x="11819074" y="2836289"/>
-                <a:chExt cx="3053444" cy="2249200"/>
-              </a:xfrm>
-            </p:grpSpPr>
-            <p:pic>
-              <p:nvPicPr>
-                <p:cNvPr id="100" name="그림 99"/>
-                <p:cNvPicPr>
-                  <a:picLocks noChangeAspect="1"/>
-                </p:cNvPicPr>
-                <p:nvPr/>
-              </p:nvPicPr>
-              <p:blipFill rotWithShape="1">
-                <a:blip r:embed="rId3"/>
-                <a:srcRect l="67265" b="1892"/>
-                <a:stretch/>
-              </p:blipFill>
-              <p:spPr>
-                <a:xfrm>
-                  <a:off x="11819074" y="2836289"/>
-                  <a:ext cx="3053444" cy="2249200"/>
-                </a:xfrm>
-                <a:prstGeom prst="rect">
-                  <a:avLst/>
-                </a:prstGeom>
-              </p:spPr>
-            </p:pic>
-            <p:sp>
-              <p:nvSpPr>
-                <p:cNvPr id="101" name="직사각형 100"/>
-                <p:cNvSpPr/>
-                <p:nvPr/>
-              </p:nvSpPr>
-              <p:spPr>
-                <a:xfrm>
-                  <a:off x="11978593" y="2836289"/>
-                  <a:ext cx="2728007" cy="853061"/>
-                </a:xfrm>
-                <a:prstGeom prst="rect">
-                  <a:avLst/>
-                </a:prstGeom>
-                <a:solidFill>
-                  <a:srgbClr val="FFFF00">
-                    <a:alpha val="40000"/>
-                  </a:srgbClr>
-                </a:solidFill>
-                <a:ln>
-                  <a:noFill/>
-                </a:ln>
-              </p:spPr>
-              <p:style>
-                <a:lnRef idx="2">
-                  <a:schemeClr val="accent1">
-                    <a:shade val="50000"/>
-                  </a:schemeClr>
-                </a:lnRef>
-                <a:fillRef idx="1">
-                  <a:schemeClr val="accent1"/>
-                </a:fillRef>
-                <a:effectRef idx="0">
-                  <a:schemeClr val="accent1"/>
-                </a:effectRef>
-                <a:fontRef idx="minor">
-                  <a:schemeClr val="lt1"/>
-                </a:fontRef>
-              </p:style>
-              <p:txBody>
-                <a:bodyPr rtlCol="0" anchor="ctr"/>
-                <a:lstStyle/>
-                <a:p>
-                  <a:pPr algn="ctr"/>
-                  <a:endParaRPr lang="ko-KR" altLang="en-US"/>
-                </a:p>
-              </p:txBody>
-            </p:sp>
-            <p:sp>
-              <p:nvSpPr>
-                <p:cNvPr id="102" name="직사각형 101"/>
-                <p:cNvSpPr/>
-                <p:nvPr/>
-              </p:nvSpPr>
-              <p:spPr>
-                <a:xfrm>
-                  <a:off x="11819074" y="4649578"/>
-                  <a:ext cx="3030401" cy="408198"/>
-                </a:xfrm>
-                <a:prstGeom prst="rect">
-                  <a:avLst/>
-                </a:prstGeom>
-                <a:solidFill>
-                  <a:srgbClr val="00B050">
-                    <a:alpha val="40000"/>
-                  </a:srgbClr>
-                </a:solidFill>
-                <a:ln>
-                  <a:noFill/>
-                </a:ln>
-              </p:spPr>
-              <p:style>
-                <a:lnRef idx="2">
-                  <a:schemeClr val="accent1">
-                    <a:shade val="50000"/>
-                  </a:schemeClr>
-                </a:lnRef>
-                <a:fillRef idx="1">
-                  <a:schemeClr val="accent1"/>
-                </a:fillRef>
-                <a:effectRef idx="0">
-                  <a:schemeClr val="accent1"/>
-                </a:effectRef>
-                <a:fontRef idx="minor">
-                  <a:schemeClr val="lt1"/>
-                </a:fontRef>
-              </p:style>
-              <p:txBody>
-                <a:bodyPr rtlCol="0" anchor="ctr"/>
-                <a:lstStyle/>
-                <a:p>
-                  <a:pPr algn="ctr"/>
-                  <a:endParaRPr lang="ko-KR" altLang="en-US"/>
-                </a:p>
-              </p:txBody>
-            </p:sp>
-            <p:sp>
-              <p:nvSpPr>
-                <p:cNvPr id="103" name="직사각형 102"/>
-                <p:cNvSpPr/>
-                <p:nvPr/>
-              </p:nvSpPr>
-              <p:spPr>
-                <a:xfrm>
-                  <a:off x="11827395" y="4338556"/>
-                  <a:ext cx="3030401" cy="408198"/>
-                </a:xfrm>
-                <a:prstGeom prst="rect">
-                  <a:avLst/>
-                </a:prstGeom>
-                <a:solidFill>
-                  <a:srgbClr val="2D9CDB">
-                    <a:alpha val="40000"/>
-                  </a:srgbClr>
-                </a:solidFill>
-                <a:ln>
-                  <a:noFill/>
-                </a:ln>
-              </p:spPr>
-              <p:style>
-                <a:lnRef idx="2">
-                  <a:schemeClr val="accent1">
-                    <a:shade val="50000"/>
-                  </a:schemeClr>
-                </a:lnRef>
-                <a:fillRef idx="1">
-                  <a:schemeClr val="accent1"/>
-                </a:fillRef>
-                <a:effectRef idx="0">
-                  <a:schemeClr val="accent1"/>
-                </a:effectRef>
-                <a:fontRef idx="minor">
-                  <a:schemeClr val="lt1"/>
-                </a:fontRef>
-              </p:style>
-              <p:txBody>
-                <a:bodyPr rtlCol="0" anchor="ctr"/>
-                <a:lstStyle/>
-                <a:p>
-                  <a:pPr algn="ctr"/>
-                  <a:endParaRPr lang="ko-KR" altLang="en-US"/>
-                </a:p>
-              </p:txBody>
-            </p:sp>
-          </p:grpSp>
-          <p:sp>
-            <p:nvSpPr>
-              <p:cNvPr id="98" name="TextBox 97"/>
-              <p:cNvSpPr txBox="1"/>
-              <p:nvPr/>
-            </p:nvSpPr>
-            <p:spPr>
-              <a:xfrm>
-                <a:off x="13594976" y="4737794"/>
-                <a:ext cx="1296107" cy="276999"/>
-              </a:xfrm>
-              <a:prstGeom prst="rect">
-                <a:avLst/>
-              </a:prstGeom>
-              <a:noFill/>
-            </p:spPr>
-            <p:txBody>
-              <a:bodyPr wrap="square" rtlCol="0">
-                <a:spAutoFit/>
-              </a:bodyPr>
-              <a:lstStyle/>
-              <a:p>
-                <a:r>
-                  <a:rPr lang="en-US" altLang="ko-KR" sz="1200" b="1" smtClean="0">
-                    <a:solidFill>
-                      <a:schemeClr val="bg1"/>
-                    </a:solidFill>
-                  </a:rPr>
-                  <a:t>near point ROI</a:t>
-                </a:r>
-                <a:endParaRPr lang="ko-KR" altLang="en-US" sz="1200" b="1">
-                  <a:solidFill>
-                    <a:schemeClr val="bg1"/>
-                  </a:solidFill>
-                </a:endParaRPr>
-              </a:p>
-            </p:txBody>
-          </p:sp>
-          <p:sp>
-            <p:nvSpPr>
-              <p:cNvPr id="99" name="TextBox 98"/>
-              <p:cNvSpPr txBox="1"/>
-              <p:nvPr/>
-            </p:nvSpPr>
-            <p:spPr>
-              <a:xfrm>
-                <a:off x="11839649" y="4320520"/>
-                <a:ext cx="1296107" cy="276999"/>
-              </a:xfrm>
-              <a:prstGeom prst="rect">
-                <a:avLst/>
-              </a:prstGeom>
-              <a:noFill/>
-            </p:spPr>
-            <p:txBody>
-              <a:bodyPr wrap="square" rtlCol="0">
-                <a:spAutoFit/>
-              </a:bodyPr>
-              <a:lstStyle/>
-              <a:p>
-                <a:r>
-                  <a:rPr lang="en-US" altLang="ko-KR" sz="1200" b="1" smtClean="0">
-                    <a:solidFill>
-                      <a:schemeClr val="bg1"/>
-                    </a:solidFill>
-                  </a:rPr>
-                  <a:t>far point ROI</a:t>
-                </a:r>
-                <a:endParaRPr lang="ko-KR" altLang="en-US" sz="1200" b="1">
-                  <a:solidFill>
-                    <a:schemeClr val="bg1"/>
-                  </a:solidFill>
-                </a:endParaRPr>
-              </a:p>
-            </p:txBody>
-          </p:sp>
-        </p:grpSp>
         <p:sp>
           <p:nvSpPr>
-            <p:cNvPr id="96" name="TextBox 95"/>
-            <p:cNvSpPr txBox="1"/>
+            <p:cNvPr id="70" name="Shape 115"/>
+            <p:cNvSpPr/>
             <p:nvPr/>
           </p:nvSpPr>
           <p:spPr>
             <a:xfrm>
-              <a:off x="13329782" y="1911545"/>
-              <a:ext cx="1283493" cy="276999"/>
+              <a:off x="6466915" y="1019007"/>
+              <a:ext cx="1808054" cy="301752"/>
+            </a:xfrm>
+            <a:prstGeom prst="roundRect">
+              <a:avLst>
+                <a:gd name="adj" fmla="val 24242"/>
+              </a:avLst>
+            </a:prstGeom>
+            <a:solidFill>
+              <a:srgbClr val="1EAD7C"/>
+            </a:solidFill>
+            <a:ln w="12700">
+              <a:solidFill>
+                <a:srgbClr val="1EAD7C"/>
+              </a:solidFill>
+              <a:prstDash val="solid"/>
+            </a:ln>
+          </p:spPr>
+        </p:sp>
+        <p:sp>
+          <p:nvSpPr>
+            <p:cNvPr id="71" name="Text 116"/>
+            <p:cNvSpPr/>
+            <p:nvPr/>
+          </p:nvSpPr>
+          <p:spPr>
+            <a:xfrm>
+              <a:off x="6507110" y="1107214"/>
+              <a:ext cx="1746428" cy="128016"/>
             </a:xfrm>
             <a:prstGeom prst="rect">
               <a:avLst/>
             </a:prstGeom>
             <a:noFill/>
+            <a:ln/>
           </p:spPr>
           <p:txBody>
-            <a:bodyPr wrap="none" rtlCol="0">
-              <a:spAutoFit/>
+            <a:bodyPr wrap="square" lIns="0" tIns="0" rIns="0" bIns="0" rtlCol="0" anchor="ctr">
+              <a:noAutofit/>
             </a:bodyPr>
             <a:lstStyle/>
             <a:p>
+              <a:pPr marL="0" indent="0" algn="ctr">
+                <a:buNone/>
+              </a:pPr>
               <a:r>
-                <a:rPr lang="en-US" altLang="ko-KR" sz="1200" b="1" smtClean="0">
+                <a:rPr lang="en-US" sz="1600" b="1" dirty="0">
                   <a:solidFill>
-                    <a:schemeClr val="bg1"/>
+                    <a:srgbClr val="FFFFFF"/>
                   </a:solidFill>
+                  <a:latin typeface="Malgun Gothic" pitchFamily="34" charset="0"/>
+                  <a:ea typeface="Malgun Gothic" pitchFamily="34" charset="-122"/>
+                  <a:cs typeface="Malgun Gothic" pitchFamily="34" charset="-120"/>
                 </a:rPr>
-                <a:t>White wall ROI</a:t>
+                <a:t>Core Algorithms</a:t>
               </a:r>
-              <a:endParaRPr lang="ko-KR" altLang="en-US" sz="1200" b="1">
-                <a:solidFill>
-                  <a:schemeClr val="bg1"/>
-                </a:solidFill>
-              </a:endParaRPr>
+              <a:endParaRPr lang="en-US" sz="1600" dirty="0"/>
             </a:p>
           </p:txBody>
         </p:sp>
@@ -7177,8 +6851,8 @@
         </p:nvGrpSpPr>
         <p:grpSpPr>
           <a:xfrm>
-            <a:off x="13275250" y="1226152"/>
-            <a:ext cx="2320586" cy="1757355"/>
+            <a:off x="12698482" y="1554802"/>
+            <a:ext cx="1611113" cy="1220078"/>
             <a:chOff x="10094881" y="1604483"/>
             <a:chExt cx="4753324" cy="3599641"/>
           </a:xfrm>
@@ -7192,7 +6866,7 @@
             <p:nvPr/>
           </p:nvPicPr>
           <p:blipFill>
-            <a:blip r:embed="rId4"/>
+            <a:blip r:embed="rId3"/>
             <a:stretch>
               <a:fillRect/>
             </a:stretch>
@@ -7262,88 +6936,14 @@
       </p:grpSp>
       <p:cxnSp>
         <p:nvCxnSpPr>
-          <p:cNvPr id="107" name="직선 화살표 연결선 106"/>
+          <p:cNvPr id="109" name="직선 연결선 108"/>
           <p:cNvCxnSpPr/>
           <p:nvPr/>
         </p:nvCxnSpPr>
         <p:spPr>
-          <a:xfrm flipH="1">
-            <a:off x="8604281" y="3211188"/>
-            <a:ext cx="365396" cy="827853"/>
-          </a:xfrm>
-          <a:prstGeom prst="straightConnector1">
-            <a:avLst/>
-          </a:prstGeom>
-          <a:ln w="19050">
-            <a:solidFill>
-              <a:srgbClr val="FF0000"/>
-            </a:solidFill>
-            <a:tailEnd type="triangle"/>
-          </a:ln>
-        </p:spPr>
-        <p:style>
-          <a:lnRef idx="1">
-            <a:schemeClr val="accent1"/>
-          </a:lnRef>
-          <a:fillRef idx="0">
-            <a:schemeClr val="accent1"/>
-          </a:fillRef>
-          <a:effectRef idx="0">
-            <a:schemeClr val="accent1"/>
-          </a:effectRef>
-          <a:fontRef idx="minor">
-            <a:schemeClr val="tx1"/>
-          </a:fontRef>
-        </p:style>
-      </p:cxnSp>
-      <p:cxnSp>
-        <p:nvCxnSpPr>
-          <p:cNvPr id="108" name="직선 화살표 연결선 107"/>
-          <p:cNvCxnSpPr/>
-          <p:nvPr/>
-        </p:nvCxnSpPr>
-        <p:spPr>
-          <a:xfrm flipH="1">
-            <a:off x="7229916" y="2047372"/>
-            <a:ext cx="1531451" cy="3390786"/>
-          </a:xfrm>
-          <a:prstGeom prst="straightConnector1">
-            <a:avLst/>
-          </a:prstGeom>
-          <a:ln w="19050">
-            <a:solidFill>
-              <a:srgbClr val="FF0000"/>
-            </a:solidFill>
-            <a:tailEnd type="triangle"/>
-          </a:ln>
-        </p:spPr>
-        <p:style>
-          <a:lnRef idx="1">
-            <a:schemeClr val="accent1"/>
-          </a:lnRef>
-          <a:fillRef idx="0">
-            <a:schemeClr val="accent1"/>
-          </a:fillRef>
-          <a:effectRef idx="0">
-            <a:schemeClr val="accent1"/>
-          </a:effectRef>
-          <a:fontRef idx="minor">
-            <a:schemeClr val="tx1"/>
-          </a:fontRef>
-        </p:style>
-      </p:cxnSp>
-      <p:cxnSp>
-        <p:nvCxnSpPr>
-          <p:cNvPr id="109" name="직선 연결선 108"/>
-          <p:cNvCxnSpPr>
-            <a:stCxn id="79" idx="1"/>
-          </p:cNvCxnSpPr>
-          <p:nvPr/>
-        </p:nvCxnSpPr>
-        <p:spPr>
-          <a:xfrm>
-            <a:off x="8983438" y="3260803"/>
-            <a:ext cx="651999" cy="0"/>
+          <a:xfrm>
+            <a:off x="8863297" y="3964565"/>
+            <a:ext cx="801027" cy="0"/>
           </a:xfrm>
           <a:prstGeom prst="line">
             <a:avLst/>
@@ -7377,8 +6977,8 @@
         </p:nvCxnSpPr>
         <p:spPr>
           <a:xfrm>
-            <a:off x="8784039" y="2045558"/>
-            <a:ext cx="1079835" cy="0"/>
+            <a:off x="8596495" y="2702951"/>
+            <a:ext cx="1295659" cy="0"/>
           </a:xfrm>
           <a:prstGeom prst="line">
             <a:avLst/>
@@ -7411,9 +7011,9 @@
           <p:nvPr/>
         </p:nvCxnSpPr>
         <p:spPr>
-          <a:xfrm>
-            <a:off x="12019649" y="1883709"/>
-            <a:ext cx="1637204" cy="0"/>
+          <a:xfrm flipV="1">
+            <a:off x="12274795" y="2374021"/>
+            <a:ext cx="512941" cy="227786"/>
           </a:xfrm>
           <a:prstGeom prst="straightConnector1">
             <a:avLst/>
@@ -7448,8 +7048,8 @@
         </p:nvCxnSpPr>
         <p:spPr>
           <a:xfrm>
-            <a:off x="11160928" y="2001197"/>
-            <a:ext cx="817496" cy="0"/>
+            <a:off x="11345892" y="2539178"/>
+            <a:ext cx="924401" cy="0"/>
           </a:xfrm>
           <a:prstGeom prst="line">
             <a:avLst/>
@@ -7483,7 +7083,7 @@
         </p:nvGrpSpPr>
         <p:grpSpPr>
           <a:xfrm>
-            <a:off x="132376" y="6439697"/>
+            <a:off x="554603" y="6395366"/>
             <a:ext cx="3879786" cy="301752"/>
             <a:chOff x="7888308" y="1197864"/>
             <a:chExt cx="2617767" cy="301752"/>
@@ -7564,7 +7164,7 @@
         </p:nvCxnSpPr>
         <p:spPr>
           <a:xfrm>
-            <a:off x="2208960" y="7047648"/>
+            <a:off x="2631187" y="7003317"/>
             <a:ext cx="164592" cy="0"/>
           </a:xfrm>
           <a:prstGeom prst="line">
@@ -7599,7 +7199,7 @@
         </p:nvCxnSpPr>
         <p:spPr>
           <a:xfrm>
-            <a:off x="3681144" y="7047648"/>
+            <a:off x="4103371" y="7003317"/>
             <a:ext cx="164592" cy="0"/>
           </a:xfrm>
           <a:prstGeom prst="line">
@@ -7634,7 +7234,7 @@
         </p:nvCxnSpPr>
         <p:spPr>
           <a:xfrm>
-            <a:off x="5153328" y="7047648"/>
+            <a:off x="5575555" y="7003317"/>
             <a:ext cx="164592" cy="0"/>
           </a:xfrm>
           <a:prstGeom prst="line">
@@ -7669,7 +7269,7 @@
         </p:nvCxnSpPr>
         <p:spPr>
           <a:xfrm>
-            <a:off x="6625512" y="7047648"/>
+            <a:off x="7047739" y="7003317"/>
             <a:ext cx="164592" cy="0"/>
           </a:xfrm>
           <a:prstGeom prst="line">
@@ -7704,7 +7304,7 @@
         </p:nvCxnSpPr>
         <p:spPr>
           <a:xfrm>
-            <a:off x="8097696" y="7047648"/>
+            <a:off x="8519923" y="7003317"/>
             <a:ext cx="164592" cy="0"/>
           </a:xfrm>
           <a:prstGeom prst="line">
@@ -7739,7 +7339,7 @@
         </p:nvSpPr>
         <p:spPr>
           <a:xfrm>
-            <a:off x="937944" y="6910488"/>
+            <a:off x="1360171" y="6866157"/>
             <a:ext cx="1234440" cy="361002"/>
           </a:xfrm>
           <a:prstGeom prst="roundRect">
@@ -7793,7 +7393,7 @@
         </p:nvSpPr>
         <p:spPr>
           <a:xfrm>
-            <a:off x="2410128" y="6910488"/>
+            <a:off x="2832355" y="6866157"/>
             <a:ext cx="1234440" cy="361002"/>
           </a:xfrm>
           <a:prstGeom prst="roundRect">
@@ -7859,7 +7459,7 @@
         </p:nvSpPr>
         <p:spPr>
           <a:xfrm>
-            <a:off x="3882312" y="6910488"/>
+            <a:off x="4304539" y="6866157"/>
             <a:ext cx="1234440" cy="361002"/>
           </a:xfrm>
           <a:prstGeom prst="roundRect">
@@ -7913,7 +7513,7 @@
         </p:nvSpPr>
         <p:spPr>
           <a:xfrm>
-            <a:off x="5354496" y="6910488"/>
+            <a:off x="5776723" y="6866157"/>
             <a:ext cx="1234440" cy="361002"/>
           </a:xfrm>
           <a:prstGeom prst="roundRect">
@@ -7979,7 +7579,7 @@
         </p:nvSpPr>
         <p:spPr>
           <a:xfrm>
-            <a:off x="6826680" y="6910488"/>
+            <a:off x="7248907" y="6866157"/>
             <a:ext cx="1234440" cy="361002"/>
           </a:xfrm>
           <a:prstGeom prst="roundRect">
@@ -8033,7 +7633,7 @@
         </p:nvSpPr>
         <p:spPr>
           <a:xfrm>
-            <a:off x="8298864" y="6910488"/>
+            <a:off x="8721091" y="6866157"/>
             <a:ext cx="1234440" cy="361002"/>
           </a:xfrm>
           <a:prstGeom prst="roundRect">
@@ -8087,7 +7687,7 @@
         </p:nvCxnSpPr>
         <p:spPr>
           <a:xfrm>
-            <a:off x="2004652" y="8062764"/>
+            <a:off x="2426879" y="8018433"/>
             <a:ext cx="164592" cy="0"/>
           </a:xfrm>
           <a:prstGeom prst="line">
@@ -8122,7 +7722,7 @@
         </p:nvCxnSpPr>
         <p:spPr>
           <a:xfrm>
-            <a:off x="3879172" y="8062764"/>
+            <a:off x="4301399" y="8018433"/>
             <a:ext cx="210312" cy="0"/>
           </a:xfrm>
           <a:prstGeom prst="line">
@@ -8157,7 +7757,7 @@
         </p:nvCxnSpPr>
         <p:spPr>
           <a:xfrm>
-            <a:off x="6046300" y="8062764"/>
+            <a:off x="6468527" y="8018433"/>
             <a:ext cx="265176" cy="0"/>
           </a:xfrm>
           <a:prstGeom prst="line">
@@ -8192,7 +7792,7 @@
         </p:nvCxnSpPr>
         <p:spPr>
           <a:xfrm>
-            <a:off x="10307404" y="8062764"/>
+            <a:off x="10729631" y="8018433"/>
             <a:ext cx="274319" cy="0"/>
           </a:xfrm>
           <a:prstGeom prst="line">
@@ -8227,7 +7827,7 @@
         </p:nvSpPr>
         <p:spPr>
           <a:xfrm>
-            <a:off x="843364" y="7797588"/>
+            <a:off x="1265591" y="7753257"/>
             <a:ext cx="1124712" cy="530352"/>
           </a:xfrm>
           <a:prstGeom prst="roundRect">
@@ -8293,7 +7893,7 @@
         </p:nvSpPr>
         <p:spPr>
           <a:xfrm>
-            <a:off x="2214964" y="7797588"/>
+            <a:off x="2637191" y="7753257"/>
             <a:ext cx="1627632" cy="530352"/>
           </a:xfrm>
           <a:prstGeom prst="roundRect">
@@ -8359,7 +7959,7 @@
         </p:nvSpPr>
         <p:spPr>
           <a:xfrm>
-            <a:off x="4135203" y="7797588"/>
+            <a:off x="4557430" y="7753257"/>
             <a:ext cx="1874519" cy="530352"/>
           </a:xfrm>
           <a:prstGeom prst="roundRect">
@@ -8425,7 +8025,7 @@
         </p:nvSpPr>
         <p:spPr>
           <a:xfrm>
-            <a:off x="6357196" y="7711862"/>
+            <a:off x="6779423" y="7667531"/>
             <a:ext cx="3913632" cy="648839"/>
           </a:xfrm>
           <a:prstGeom prst="roundRect">
@@ -8491,7 +8091,7 @@
         </p:nvSpPr>
         <p:spPr>
           <a:xfrm>
-            <a:off x="10627444" y="7797588"/>
+            <a:off x="11049671" y="7753257"/>
             <a:ext cx="2157984" cy="530352"/>
           </a:xfrm>
           <a:prstGeom prst="roundRect">
@@ -8557,7 +8157,7 @@
         </p:nvSpPr>
         <p:spPr>
           <a:xfrm>
-            <a:off x="6135013" y="8344987"/>
+            <a:off x="6557240" y="8300656"/>
             <a:ext cx="833830" cy="352800"/>
           </a:xfrm>
           <a:prstGeom prst="roundRect">
@@ -8623,7 +8223,7 @@
         </p:nvSpPr>
         <p:spPr>
           <a:xfrm>
-            <a:off x="6999344" y="8341481"/>
+            <a:off x="7421571" y="8297150"/>
             <a:ext cx="835200" cy="351558"/>
           </a:xfrm>
           <a:prstGeom prst="roundRect">
@@ -8689,7 +8289,7 @@
         </p:nvSpPr>
         <p:spPr>
           <a:xfrm>
-            <a:off x="7872779" y="8344987"/>
+            <a:off x="8295006" y="8300656"/>
             <a:ext cx="867850" cy="352800"/>
           </a:xfrm>
           <a:prstGeom prst="roundRect">
@@ -8755,7 +8355,7 @@
         </p:nvSpPr>
         <p:spPr>
           <a:xfrm>
-            <a:off x="8774026" y="8344656"/>
+            <a:off x="9196253" y="8300325"/>
             <a:ext cx="658368" cy="352800"/>
           </a:xfrm>
           <a:prstGeom prst="roundRect">
@@ -8821,7 +8421,7 @@
         </p:nvSpPr>
         <p:spPr>
           <a:xfrm>
-            <a:off x="9465289" y="8344987"/>
+            <a:off x="9887516" y="8300656"/>
             <a:ext cx="973639" cy="352800"/>
           </a:xfrm>
           <a:prstGeom prst="roundRect">
@@ -8879,64 +8479,261 @@
           </a:p>
         </p:txBody>
       </p:sp>
-      <p:sp>
-        <p:nvSpPr>
-          <p:cNvPr id="189" name="TextBox 188"/>
-          <p:cNvSpPr txBox="1"/>
+      <p:grpSp>
+        <p:nvGrpSpPr>
+          <p:cNvPr id="158" name="그룹 157"/>
+          <p:cNvGrpSpPr/>
           <p:nvPr/>
-        </p:nvSpPr>
-        <p:spPr>
-          <a:xfrm>
-            <a:off x="6967707" y="6066281"/>
-            <a:ext cx="2193229" cy="276999"/>
-          </a:xfrm>
-          <a:prstGeom prst="rect">
-            <a:avLst/>
-          </a:prstGeom>
-          <a:noFill/>
-        </p:spPr>
-        <p:txBody>
-          <a:bodyPr wrap="none" rtlCol="0">
-            <a:spAutoFit/>
-          </a:bodyPr>
-          <a:lstStyle/>
-          <a:p>
-            <a:pPr marL="285750" indent="-285750">
-              <a:buFont typeface="Wingdings" panose="05000000000000000000" pitchFamily="2" charset="2"/>
-              <a:buChar char="Ø"/>
-            </a:pPr>
-            <a:r>
-              <a:rPr lang="en-US" altLang="ko-KR" sz="1200" smtClean="0">
+        </p:nvGrpSpPr>
+        <p:grpSpPr>
+          <a:xfrm>
+            <a:off x="7925212" y="4353437"/>
+            <a:ext cx="2078254" cy="1755578"/>
+            <a:chOff x="7004559" y="4028698"/>
+            <a:chExt cx="2581940" cy="2181060"/>
+          </a:xfrm>
+        </p:grpSpPr>
+        <p:grpSp>
+          <p:nvGrpSpPr>
+            <p:cNvPr id="97" name="그룹 96"/>
+            <p:cNvGrpSpPr/>
+            <p:nvPr/>
+          </p:nvGrpSpPr>
+          <p:grpSpPr>
+            <a:xfrm>
+              <a:off x="7041525" y="4028698"/>
+              <a:ext cx="2544974" cy="1924252"/>
+              <a:chOff x="11819074" y="2836289"/>
+              <a:chExt cx="3053444" cy="2249200"/>
+            </a:xfrm>
+          </p:grpSpPr>
+          <p:pic>
+            <p:nvPicPr>
+              <p:cNvPr id="100" name="그림 99"/>
+              <p:cNvPicPr>
+                <a:picLocks noChangeAspect="1"/>
+              </p:cNvPicPr>
+              <p:nvPr/>
+            </p:nvPicPr>
+            <p:blipFill rotWithShape="1">
+              <a:blip r:embed="rId4"/>
+              <a:srcRect l="67265" b="1892"/>
+              <a:stretch/>
+            </p:blipFill>
+            <p:spPr>
+              <a:xfrm>
+                <a:off x="11819074" y="2836289"/>
+                <a:ext cx="3053444" cy="2249200"/>
+              </a:xfrm>
+              <a:prstGeom prst="rect">
+                <a:avLst/>
+              </a:prstGeom>
+            </p:spPr>
+          </p:pic>
+          <p:sp>
+            <p:nvSpPr>
+              <p:cNvPr id="101" name="직사각형 100"/>
+              <p:cNvSpPr/>
+              <p:nvPr/>
+            </p:nvSpPr>
+            <p:spPr>
+              <a:xfrm>
+                <a:off x="11978593" y="2836289"/>
+                <a:ext cx="2728007" cy="853061"/>
+              </a:xfrm>
+              <a:prstGeom prst="rect">
+                <a:avLst/>
+              </a:prstGeom>
+              <a:solidFill>
+                <a:srgbClr val="FFFF00">
+                  <a:alpha val="40000"/>
+                </a:srgbClr>
+              </a:solidFill>
+              <a:ln>
+                <a:noFill/>
+              </a:ln>
+            </p:spPr>
+            <p:style>
+              <a:lnRef idx="2">
+                <a:schemeClr val="accent1">
+                  <a:shade val="50000"/>
+                </a:schemeClr>
+              </a:lnRef>
+              <a:fillRef idx="1">
+                <a:schemeClr val="accent1"/>
+              </a:fillRef>
+              <a:effectRef idx="0">
+                <a:schemeClr val="accent1"/>
+              </a:effectRef>
+              <a:fontRef idx="minor">
+                <a:schemeClr val="lt1"/>
+              </a:fontRef>
+            </p:style>
+            <p:txBody>
+              <a:bodyPr rtlCol="0" anchor="ctr"/>
+              <a:lstStyle/>
+              <a:p>
+                <a:pPr algn="ctr"/>
+                <a:endParaRPr lang="ko-KR" altLang="en-US"/>
+              </a:p>
+            </p:txBody>
+          </p:sp>
+          <p:sp>
+            <p:nvSpPr>
+              <p:cNvPr id="102" name="직사각형 101"/>
+              <p:cNvSpPr/>
+              <p:nvPr/>
+            </p:nvSpPr>
+            <p:spPr>
+              <a:xfrm>
+                <a:off x="11819074" y="4649578"/>
+                <a:ext cx="3030401" cy="408198"/>
+              </a:xfrm>
+              <a:prstGeom prst="rect">
+                <a:avLst/>
+              </a:prstGeom>
+              <a:solidFill>
+                <a:srgbClr val="00B050">
+                  <a:alpha val="40000"/>
+                </a:srgbClr>
+              </a:solidFill>
+              <a:ln>
+                <a:noFill/>
+              </a:ln>
+            </p:spPr>
+            <p:style>
+              <a:lnRef idx="2">
+                <a:schemeClr val="accent1">
+                  <a:shade val="50000"/>
+                </a:schemeClr>
+              </a:lnRef>
+              <a:fillRef idx="1">
+                <a:schemeClr val="accent1"/>
+              </a:fillRef>
+              <a:effectRef idx="0">
+                <a:schemeClr val="accent1"/>
+              </a:effectRef>
+              <a:fontRef idx="minor">
+                <a:schemeClr val="lt1"/>
+              </a:fontRef>
+            </p:style>
+            <p:txBody>
+              <a:bodyPr rtlCol="0" anchor="ctr"/>
+              <a:lstStyle/>
+              <a:p>
+                <a:pPr algn="ctr"/>
+                <a:endParaRPr lang="ko-KR" altLang="en-US"/>
+              </a:p>
+            </p:txBody>
+          </p:sp>
+          <p:sp>
+            <p:nvSpPr>
+              <p:cNvPr id="103" name="직사각형 102"/>
+              <p:cNvSpPr/>
+              <p:nvPr/>
+            </p:nvSpPr>
+            <p:spPr>
+              <a:xfrm>
+                <a:off x="11827395" y="4338556"/>
+                <a:ext cx="3030401" cy="408198"/>
+              </a:xfrm>
+              <a:prstGeom prst="rect">
+                <a:avLst/>
+              </a:prstGeom>
+              <a:solidFill>
+                <a:srgbClr val="2D9CDB">
+                  <a:alpha val="40000"/>
+                </a:srgbClr>
+              </a:solidFill>
+              <a:ln>
+                <a:noFill/>
+              </a:ln>
+            </p:spPr>
+            <p:style>
+              <a:lnRef idx="2">
+                <a:schemeClr val="accent1">
+                  <a:shade val="50000"/>
+                </a:schemeClr>
+              </a:lnRef>
+              <a:fillRef idx="1">
+                <a:schemeClr val="accent1"/>
+              </a:fillRef>
+              <a:effectRef idx="0">
+                <a:schemeClr val="accent1"/>
+              </a:effectRef>
+              <a:fontRef idx="minor">
+                <a:schemeClr val="lt1"/>
+              </a:fontRef>
+            </p:style>
+            <p:txBody>
+              <a:bodyPr rtlCol="0" anchor="ctr"/>
+              <a:lstStyle/>
+              <a:p>
+                <a:pPr algn="ctr"/>
+                <a:endParaRPr lang="ko-KR" altLang="en-US"/>
+              </a:p>
+            </p:txBody>
+          </p:sp>
+        </p:grpSp>
+        <p:sp>
+          <p:nvSpPr>
+            <p:cNvPr id="189" name="TextBox 188"/>
+            <p:cNvSpPr txBox="1"/>
+            <p:nvPr/>
+          </p:nvSpPr>
+          <p:spPr>
+            <a:xfrm>
+              <a:off x="7004559" y="5948148"/>
+              <a:ext cx="2098651" cy="261610"/>
+            </a:xfrm>
+            <a:prstGeom prst="rect">
+              <a:avLst/>
+            </a:prstGeom>
+            <a:noFill/>
+          </p:spPr>
+          <p:txBody>
+            <a:bodyPr wrap="none" rtlCol="0">
+              <a:spAutoFit/>
+            </a:bodyPr>
+            <a:lstStyle/>
+            <a:p>
+              <a:pPr marL="285750" indent="-285750">
+                <a:buFont typeface="Wingdings" panose="05000000000000000000" pitchFamily="2" charset="2"/>
+                <a:buChar char="Ø"/>
+              </a:pPr>
+              <a:r>
+                <a:rPr lang="en-US" altLang="ko-KR" sz="1050" smtClean="0">
+                  <a:solidFill>
+                    <a:schemeClr val="bg2"/>
+                  </a:solidFill>
+                </a:rPr>
+                <a:t>OpenCV </a:t>
+              </a:r>
+              <a:r>
+                <a:rPr lang="ko-KR" altLang="en-US" sz="1050" smtClean="0">
+                  <a:solidFill>
+                    <a:schemeClr val="bg2"/>
+                  </a:solidFill>
+                </a:rPr>
+                <a:t>영상 처리 사진</a:t>
+              </a:r>
+              <a:r>
+                <a:rPr lang="en-US" altLang="ko-KR" sz="1050" smtClean="0">
+                  <a:solidFill>
+                    <a:schemeClr val="bg2"/>
+                  </a:solidFill>
+                </a:rPr>
+                <a:t>  </a:t>
+              </a:r>
+              <a:endParaRPr lang="ko-KR" altLang="en-US" sz="1050">
                 <a:solidFill>
-                  <a:schemeClr val="bg1"/>
+                  <a:schemeClr val="bg2"/>
                 </a:solidFill>
-              </a:rPr>
-              <a:t>OpenCV </a:t>
-            </a:r>
-            <a:r>
-              <a:rPr lang="ko-KR" altLang="en-US" sz="1200" smtClean="0">
-                <a:solidFill>
-                  <a:schemeClr val="bg1"/>
-                </a:solidFill>
-              </a:rPr>
-              <a:t>영상 처리 사진</a:t>
-            </a:r>
-            <a:r>
-              <a:rPr lang="en-US" altLang="ko-KR" sz="1200" smtClean="0">
-                <a:solidFill>
-                  <a:schemeClr val="bg1"/>
-                </a:solidFill>
-              </a:rPr>
-              <a:t> </a:t>
-            </a:r>
-            <a:endParaRPr lang="ko-KR" altLang="en-US" sz="1200">
-              <a:solidFill>
-                <a:schemeClr val="bg1"/>
-              </a:solidFill>
-            </a:endParaRPr>
-          </a:p>
-        </p:txBody>
-      </p:sp>
+              </a:endParaRPr>
+            </a:p>
+          </p:txBody>
+        </p:sp>
+      </p:grpSp>
       <p:cxnSp>
         <p:nvCxnSpPr>
           <p:cNvPr id="191" name="직선 화살표 연결선 190"/>
@@ -8945,7 +8742,7 @@
         </p:nvCxnSpPr>
         <p:spPr>
           <a:xfrm>
-            <a:off x="1966103" y="7271490"/>
+            <a:off x="2388330" y="7227159"/>
             <a:ext cx="120109" cy="742210"/>
           </a:xfrm>
           <a:prstGeom prst="straightConnector1">
@@ -8973,52 +8770,82 @@
           </a:fontRef>
         </p:style>
       </p:cxnSp>
-      <p:sp>
-        <p:nvSpPr>
-          <p:cNvPr id="198" name="직사각형 197"/>
-          <p:cNvSpPr/>
+      <p:cxnSp>
+        <p:nvCxnSpPr>
+          <p:cNvPr id="113" name="꺾인 연결선 112"/>
+          <p:cNvCxnSpPr/>
           <p:nvPr/>
-        </p:nvSpPr>
-        <p:spPr>
-          <a:xfrm>
-            <a:off x="6834300" y="7966556"/>
-            <a:ext cx="1353312" cy="158982"/>
-          </a:xfrm>
-          <a:prstGeom prst="rect">
-            <a:avLst/>
-          </a:prstGeom>
-          <a:noFill/>
+        </p:nvCxnSpPr>
+        <p:spPr>
+          <a:xfrm rot="5400000">
+            <a:off x="8423608" y="4184830"/>
+            <a:ext cx="694972" cy="123037"/>
+          </a:xfrm>
+          <a:prstGeom prst="bentConnector3">
+            <a:avLst>
+              <a:gd name="adj1" fmla="val -437"/>
+            </a:avLst>
+          </a:prstGeom>
           <a:ln w="19050">
             <a:solidFill>
               <a:srgbClr val="FF0000"/>
             </a:solidFill>
+            <a:tailEnd type="triangle"/>
           </a:ln>
         </p:spPr>
         <p:style>
-          <a:lnRef idx="2">
-            <a:schemeClr val="accent1">
-              <a:shade val="50000"/>
-            </a:schemeClr>
+          <a:lnRef idx="1">
+            <a:schemeClr val="accent1"/>
           </a:lnRef>
-          <a:fillRef idx="1">
+          <a:fillRef idx="0">
             <a:schemeClr val="accent1"/>
           </a:fillRef>
           <a:effectRef idx="0">
             <a:schemeClr val="accent1"/>
           </a:effectRef>
           <a:fontRef idx="minor">
-            <a:schemeClr val="lt1"/>
+            <a:schemeClr val="tx1"/>
           </a:fontRef>
         </p:style>
-        <p:txBody>
-          <a:bodyPr rtlCol="0" anchor="ctr"/>
-          <a:lstStyle/>
-          <a:p>
-            <a:pPr algn="ctr"/>
-            <a:endParaRPr lang="ko-KR" altLang="en-US"/>
-          </a:p>
-        </p:txBody>
-      </p:sp>
+      </p:cxnSp>
+      <p:cxnSp>
+        <p:nvCxnSpPr>
+          <p:cNvPr id="150" name="꺾인 연결선 149"/>
+          <p:cNvCxnSpPr/>
+          <p:nvPr/>
+        </p:nvCxnSpPr>
+        <p:spPr>
+          <a:xfrm rot="5400000">
+            <a:off x="6775192" y="4022223"/>
+            <a:ext cx="3122784" cy="446486"/>
+          </a:xfrm>
+          <a:prstGeom prst="bentConnector3">
+            <a:avLst>
+              <a:gd name="adj1" fmla="val -267"/>
+            </a:avLst>
+          </a:prstGeom>
+          <a:ln w="19050">
+            <a:solidFill>
+              <a:srgbClr val="FF0000"/>
+            </a:solidFill>
+            <a:tailEnd type="triangle"/>
+          </a:ln>
+        </p:spPr>
+        <p:style>
+          <a:lnRef idx="1">
+            <a:schemeClr val="accent1"/>
+          </a:lnRef>
+          <a:fillRef idx="0">
+            <a:schemeClr val="accent1"/>
+          </a:fillRef>
+          <a:effectRef idx="0">
+            <a:schemeClr val="accent1"/>
+          </a:effectRef>
+          <a:fontRef idx="minor">
+            <a:schemeClr val="tx1"/>
+          </a:fontRef>
+        </p:style>
+      </p:cxnSp>
     </p:spTree>
     <p:extLst>
       <p:ext uri="{BB962C8B-B14F-4D97-AF65-F5344CB8AC3E}">
